--- a/abbildungen/kap3/Exemplarische_Struktur_im_Reporting.pptx
+++ b/abbildungen/kap3/Exemplarische_Struktur_im_Reporting.pptx
@@ -4219,36 +4219,7 @@
       </p:sp>
       <p:sp>
         <p:nvSpPr>
-          <p:cNvPr id="24" name="Knoten"/>
-          <p:cNvSpPr/>
-          <p:nvPr/>
-        </p:nvSpPr>
-        <p:spPr>
-          <a:xfrm>
-            <a:off x="145800" y="556200"/>
-            <a:ext cx="32400" cy="32400"/>
-          </a:xfrm>
-          <a:prstGeom prst="ellipse">
-            <a:avLst/>
-          </a:prstGeom>
-          <a:solidFill>
-            <a:srgbClr val="3A3F44"/>
-          </a:solidFill>
-          <a:ln>
-            <a:noFill/>
-          </a:ln>
-        </p:spPr>
-        <p:txBody>
-          <a:bodyPr rtlCol="0" anchor="ctr"/>
-          <a:lstStyle/>
-          <a:p>
-            <a:pPr algn="ctr"/>
-          </a:p>
-        </p:txBody>
-      </p:sp>
-      <p:sp>
-        <p:nvSpPr>
-          <p:cNvPr id="25" name="Abzweig 27.5"/>
+          <p:cNvPr id="24" name="Abzweig 27.5"/>
           <p:cNvSpPr/>
           <p:nvPr/>
         </p:nvSpPr>
@@ -4281,35 +4252,6 @@
             </a:solidFill>
             <a:round/>
             <a:tailEnd type="triangle" w="med" len="med"/>
-          </a:ln>
-        </p:spPr>
-        <p:txBody>
-          <a:bodyPr rtlCol="0" anchor="ctr"/>
-          <a:lstStyle/>
-          <a:p>
-            <a:pPr algn="ctr"/>
-          </a:p>
-        </p:txBody>
-      </p:sp>
-      <p:sp>
-        <p:nvSpPr>
-          <p:cNvPr id="26" name="Knoten"/>
-          <p:cNvSpPr/>
-          <p:nvPr/>
-        </p:nvSpPr>
-        <p:spPr>
-          <a:xfrm>
-            <a:off x="145800" y="973800"/>
-            <a:ext cx="32400" cy="32400"/>
-          </a:xfrm>
-          <a:prstGeom prst="ellipse">
-            <a:avLst/>
-          </a:prstGeom>
-          <a:solidFill>
-            <a:srgbClr val="3A3F44"/>
-          </a:solidFill>
-          <a:ln>
-            <a:noFill/>
           </a:ln>
         </p:spPr>
         <p:txBody>
